--- a/outsystems/niveau-3/deel-25/slidedeck.pptx
+++ b/outsystems/niveau-3/deel-25/slidedeck.pptx
@@ -3212,8 +3212,8 @@
         </p:nvSpPr>
         <p:spPr>
           <a:xfrm>
-            <a:off x="640080" y="548640"/>
-            <a:ext cx="10881360" cy="914400"/>
+            <a:off x="640080" y="457200"/>
+            <a:ext cx="10881360" cy="822960"/>
           </a:xfrm>
           <a:prstGeom prst="rect">
             <a:avLst/>
@@ -3440,8 +3440,8 @@
         </p:nvSpPr>
         <p:spPr>
           <a:xfrm>
-            <a:off x="640080" y="548640"/>
-            <a:ext cx="10881360" cy="914400"/>
+            <a:off x="640080" y="457200"/>
+            <a:ext cx="10881360" cy="822960"/>
           </a:xfrm>
           <a:prstGeom prst="rect">
             <a:avLst/>
@@ -3767,8 +3767,8 @@
         </p:nvSpPr>
         <p:spPr>
           <a:xfrm>
-            <a:off x="640080" y="457200"/>
-            <a:ext cx="10881360" cy="731520"/>
+            <a:off x="640080" y="365760"/>
+            <a:ext cx="10881360" cy="640080"/>
           </a:xfrm>
           <a:prstGeom prst="rect">
             <a:avLst/>
@@ -3783,7 +3783,7 @@
           <a:p>
             <a:pPr algn="l"/>
             <a:r>
-              <a:rPr sz="2600" b="1">
+              <a:rPr sz="2400" b="1">
                 <a:solidFill>
                   <a:srgbClr val="14213D"/>
                 </a:solidFill>
@@ -3803,8 +3803,8 @@
           <p:nvPr/>
         </p:nvGraphicFramePr>
         <p:xfrm>
-          <a:off x="640080" y="1371600"/>
-          <a:ext cx="10881360" cy="1645919"/>
+          <a:off x="640080" y="1097280"/>
+          <a:ext cx="10881360" cy="1371600"/>
         </p:xfrm>
         <a:graphic>
           <a:graphicData uri="http://schemas.openxmlformats.org/drawingml/2006/table">
@@ -3817,7 +3817,7 @@
                 <a:gridCol w="3627120"/>
                 <a:gridCol w="3627120"/>
               </a:tblGrid>
-              <a:tr h="548639">
+              <a:tr h="457200">
                 <a:tc>
                   <a:txBody>
                     <a:bodyPr/>
@@ -3832,7 +3832,7 @@
                     <a:lstStyle/>
                     <a:p>
                       <a:r>
-                        <a:rPr sz="1600" b="1"/>
+                        <a:rPr sz="1400" b="1"/>
                         <a:t>O11</a:t>
                       </a:r>
                     </a:p>
@@ -3845,7 +3845,7 @@
                     <a:lstStyle/>
                     <a:p>
                       <a:r>
-                        <a:rPr sz="1600" b="1"/>
+                        <a:rPr sz="1400" b="1"/>
                         <a:t>ODC</a:t>
                       </a:r>
                     </a:p>
@@ -3853,14 +3853,14 @@
                   <a:tcPr/>
                 </a:tc>
               </a:tr>
-              <a:tr h="548639">
+              <a:tr h="457200">
                 <a:tc>
                   <a:txBody>
                     <a:bodyPr/>
                     <a:lstStyle/>
                     <a:p>
                       <a:r>
-                        <a:rPr sz="1600"/>
+                        <a:rPr sz="1400"/>
                         <a:t>Gekoppeld aan</a:t>
                       </a:r>
                     </a:p>
@@ -3873,7 +3873,7 @@
                     <a:lstStyle/>
                     <a:p>
                       <a:r>
-                        <a:rPr sz="1600"/>
+                        <a:rPr sz="1400"/>
                         <a:t>Zelfbeheerde infrastructuur + licentie</a:t>
                       </a:r>
                     </a:p>
@@ -3886,7 +3886,7 @@
                     <a:lstStyle/>
                     <a:p>
                       <a:r>
-                        <a:rPr sz="1600"/>
+                        <a:rPr sz="1400"/>
                         <a:t>Platformverbruik binnen abonnement</a:t>
                       </a:r>
                     </a:p>
@@ -3894,14 +3894,14 @@
                   <a:tcPr/>
                 </a:tc>
               </a:tr>
-              <a:tr h="548641">
+              <a:tr h="457200">
                 <a:tc>
                   <a:txBody>
                     <a:bodyPr/>
                     <a:lstStyle/>
                     <a:p>
                       <a:r>
-                        <a:rPr sz="1600"/>
+                        <a:rPr sz="1400"/>
                         <a:t>Extra capaciteit</a:t>
                       </a:r>
                     </a:p>
@@ -3914,7 +3914,7 @@
                     <a:lstStyle/>
                     <a:p>
                       <a:r>
-                        <a:rPr sz="1600"/>
+                        <a:rPr sz="1400"/>
                         <a:t>Licentie + infra-investering</a:t>
                       </a:r>
                     </a:p>
@@ -3927,7 +3927,7 @@
                     <a:lstStyle/>
                     <a:p>
                       <a:r>
-                        <a:rPr sz="1600"/>
+                        <a:rPr sz="1400"/>
                         <a:t>Verbruik binnen het platform</a:t>
                       </a:r>
                     </a:p>
@@ -3939,6 +3939,30 @@
           </a:graphicData>
         </a:graphic>
       </p:graphicFrame>
+      <p:pic>
+        <p:nvPicPr>
+          <p:cNvPr id="4" name="Picture 3" descr="figuur-25-1.png"/>
+          <p:cNvPicPr>
+            <a:picLocks noChangeAspect="1"/>
+          </p:cNvPicPr>
+          <p:nvPr/>
+        </p:nvPicPr>
+        <p:blipFill>
+          <a:blip r:embed="rId2"/>
+          <a:stretch>
+            <a:fillRect/>
+          </a:stretch>
+        </p:blipFill>
+        <p:spPr>
+          <a:xfrm>
+            <a:off x="1780222" y="2743200"/>
+            <a:ext cx="8601075" cy="3931920"/>
+          </a:xfrm>
+          <a:prstGeom prst="rect">
+            <a:avLst/>
+          </a:prstGeom>
+        </p:spPr>
+      </p:pic>
     </p:spTree>
   </p:cSld>
   <p:clrMapOvr>
@@ -4034,8 +4058,8 @@
         </p:nvSpPr>
         <p:spPr>
           <a:xfrm>
-            <a:off x="640080" y="548640"/>
-            <a:ext cx="10881360" cy="914400"/>
+            <a:off x="640080" y="457200"/>
+            <a:ext cx="10881360" cy="822960"/>
           </a:xfrm>
           <a:prstGeom prst="rect">
             <a:avLst/>
@@ -4069,8 +4093,8 @@
         </p:nvSpPr>
         <p:spPr>
           <a:xfrm>
-            <a:off x="822960" y="1737360"/>
-            <a:ext cx="10515600" cy="4114800"/>
+            <a:off x="640080" y="1463040"/>
+            <a:ext cx="5029200" cy="4937760"/>
           </a:xfrm>
           <a:prstGeom prst="rect">
             <a:avLst/>
@@ -4085,7 +4109,7 @@
           <a:p>
             <a:pPr algn="l"/>
             <a:r>
-              <a:rPr sz="2000" b="0">
+              <a:rPr sz="1700" b="0">
                 <a:solidFill>
                   <a:srgbClr val="14213D"/>
                 </a:solidFill>
@@ -4097,7 +4121,7 @@
           <a:p>
             <a:pPr algn="l"/>
             <a:r>
-              <a:rPr sz="2000" b="0">
+              <a:rPr sz="1700" b="0">
                 <a:solidFill>
                   <a:srgbClr val="14213D"/>
                 </a:solidFill>
@@ -4109,7 +4133,7 @@
           <a:p>
             <a:pPr algn="l"/>
             <a:r>
-              <a:rPr sz="2000" b="0">
+              <a:rPr sz="1700" b="0">
                 <a:solidFill>
                   <a:srgbClr val="14213D"/>
                 </a:solidFill>
@@ -4120,41 +4144,30 @@
           </a:p>
         </p:txBody>
       </p:sp>
-      <p:sp>
-        <p:nvSpPr>
-          <p:cNvPr id="4" name="TextBox 3"/>
-          <p:cNvSpPr txBox="1"/>
+      <p:pic>
+        <p:nvPicPr>
+          <p:cNvPr id="4" name="Picture 3" descr="figuur-25-2.png"/>
+          <p:cNvPicPr>
+            <a:picLocks noChangeAspect="1"/>
+          </p:cNvPicPr>
           <p:nvPr/>
-        </p:nvSpPr>
+        </p:nvPicPr>
+        <p:blipFill>
+          <a:blip r:embed="rId2"/>
+          <a:stretch>
+            <a:fillRect/>
+          </a:stretch>
+        </p:blipFill>
         <p:spPr>
           <a:xfrm>
-            <a:off x="822960" y="5943600"/>
-            <a:ext cx="10515600" cy="731520"/>
+            <a:off x="5852160" y="2438835"/>
+            <a:ext cx="5669280" cy="3077609"/>
           </a:xfrm>
           <a:prstGeom prst="rect">
             <a:avLst/>
           </a:prstGeom>
-          <a:noFill/>
         </p:spPr>
-        <p:txBody>
-          <a:bodyPr wrap="square">
-            <a:spAutoFit/>
-          </a:bodyPr>
-          <a:lstStyle/>
-          <a:p>
-            <a:pPr algn="l"/>
-            <a:r>
-              <a:rPr sz="1300" b="0">
-                <a:solidFill>
-                  <a:srgbClr val="999999"/>
-                </a:solidFill>
-                <a:latin typeface="DM Sans"/>
-              </a:rPr>
-              <a:t>[FIGUUR 25-2: Beslisdiagram bouwen/kopen/configureren]</a:t>
-            </a:r>
-          </a:p>
-        </p:txBody>
-      </p:sp>
+      </p:pic>
     </p:spTree>
   </p:cSld>
   <p:clrMapOvr>
